--- a/踩地雷遊戲_專題報告.pptx
+++ b/踩地雷遊戲_專題報告.pptx
@@ -14,8 +14,6 @@
     <p:sldId id="262" r:id="rId13"/>
     <p:sldId id="263" r:id="rId14"/>
     <p:sldId id="264" r:id="rId15"/>
-    <p:sldId id="265" r:id="rId16"/>
-    <p:sldId id="266" r:id="rId17"/>
   </p:sldIdLst>
   <p:sldSz cx="9144000" cy="6858000" type="screen4x3"/>
   <p:notesSz cx="6858000" cy="9144000"/>
@@ -3136,7 +3134,7 @@
               </a:defRPr>
             </a:pPr>
             <a:r>
-              <a:t>踩地雷遊戲</a:t>
+              <a:t>組別</a:t>
             </a:r>
           </a:p>
         </p:txBody>
@@ -3171,12 +3169,7 @@
               </a:defRPr>
             </a:pPr>
             <a:r>
-              <a:t>Minesweeper Game</a:t>
-            </a:r>
-          </a:p>
-          <a:p>
-            <a:r>
-              <a:t>資工系 3B - 第 20 組</a:t>
+              <a:t>第 20 組</a:t>
             </a:r>
           </a:p>
         </p:txBody>
@@ -3189,199 +3182,7 @@
 </p:sld>
 </file>
 
-<file path=ppt/slides/slide10.xml><?xml version="1.0" encoding="utf-8"?>
-<p:sld xmlns:a="http://schemas.openxmlformats.org/drawingml/2006/main" xmlns:p="http://schemas.openxmlformats.org/presentationml/2006/main" xmlns:r="http://schemas.openxmlformats.org/officeDocument/2006/relationships">
-  <p:cSld>
-    <p:bg>
-      <p:bgPr>
-        <a:solidFill>
-          <a:srgbClr val="ECF0F1"/>
-        </a:solidFill>
-        <a:effectLst/>
-      </p:bgPr>
-    </p:bg>
-    <p:spTree>
-      <p:nvGrpSpPr>
-        <p:cNvPr id="1" name=""/>
-        <p:cNvGrpSpPr/>
-        <p:nvPr/>
-      </p:nvGrpSpPr>
-      <p:grpSpPr/>
-      <p:sp>
-        <p:nvSpPr>
-          <p:cNvPr id="2" name="TextBox 1"/>
-          <p:cNvSpPr txBox="1"/>
-          <p:nvPr/>
-        </p:nvSpPr>
-        <p:spPr>
-          <a:xfrm>
-            <a:off x="457200" y="457200"/>
-            <a:ext cx="8229600" cy="731520"/>
-          </a:xfrm>
-          <a:prstGeom prst="rect">
-            <a:avLst/>
-          </a:prstGeom>
-          <a:noFill/>
-        </p:spPr>
-        <p:txBody>
-          <a:bodyPr wrap="none">
-            <a:spAutoFit/>
-          </a:bodyPr>
-          <a:lstStyle/>
-          <a:p>
-            <a:pPr>
-              <a:defRPr sz="4400" b="1">
-                <a:solidFill>
-                  <a:srgbClr val="2980B9"/>
-                </a:solidFill>
-              </a:defRPr>
-            </a:pPr>
-            <a:r>
-              <a:t>特色與亮點</a:t>
-            </a:r>
-          </a:p>
-        </p:txBody>
-      </p:sp>
-      <p:sp>
-        <p:nvSpPr>
-          <p:cNvPr id="3" name="TextBox 2"/>
-          <p:cNvSpPr txBox="1"/>
-          <p:nvPr/>
-        </p:nvSpPr>
-        <p:spPr>
-          <a:xfrm>
-            <a:off x="731520" y="1371600"/>
-            <a:ext cx="7680960" cy="5029200"/>
-          </a:xfrm>
-          <a:prstGeom prst="rect">
-            <a:avLst/>
-          </a:prstGeom>
-          <a:noFill/>
-        </p:spPr>
-        <p:txBody>
-          <a:bodyPr wrap="square">
-            <a:spAutoFit/>
-          </a:bodyPr>
-          <a:lstStyle/>
-          <a:p>
-            <a:pPr>
-              <a:spcBef>
-                <a:spcPts val="800"/>
-              </a:spcBef>
-              <a:spcAft>
-                <a:spcPts val="800"/>
-              </a:spcAft>
-              <a:defRPr sz="2000">
-                <a:solidFill>
-                  <a:srgbClr val="34495E"/>
-                </a:solidFill>
-              </a:defRPr>
-            </a:pPr>
-            <a:r>
-              <a:t>✓ 跨平台支援（Windows、Linux、macOS）</a:t>
-            </a:r>
-          </a:p>
-          <a:p>
-            <a:pPr>
-              <a:spcBef>
-                <a:spcPts val="800"/>
-              </a:spcBef>
-              <a:spcAft>
-                <a:spcPts val="800"/>
-              </a:spcAft>
-              <a:defRPr sz="2000">
-                <a:solidFill>
-                  <a:srgbClr val="34495E"/>
-                </a:solidFill>
-              </a:defRPr>
-            </a:pPr>
-            <a:r>
-              <a:t>✓ 提供三個難度等級滿足不同玩家需求</a:t>
-            </a:r>
-          </a:p>
-          <a:p>
-            <a:pPr>
-              <a:spcBef>
-                <a:spcPts val="800"/>
-              </a:spcBef>
-              <a:spcAft>
-                <a:spcPts val="800"/>
-              </a:spcAft>
-              <a:defRPr sz="2000">
-                <a:solidFill>
-                  <a:srgbClr val="34495E"/>
-                </a:solidFill>
-              </a:defRPr>
-            </a:pPr>
-            <a:r>
-              <a:t>✓ 清晰的面向物件設計</a:t>
-            </a:r>
-          </a:p>
-          <a:p>
-            <a:pPr>
-              <a:spcBef>
-                <a:spcPts val="800"/>
-              </a:spcBef>
-              <a:spcAft>
-                <a:spcPts val="800"/>
-              </a:spcAft>
-              <a:defRPr sz="2000">
-                <a:solidFill>
-                  <a:srgbClr val="34495E"/>
-                </a:solidFill>
-              </a:defRPr>
-            </a:pPr>
-            <a:r>
-              <a:t>✓ 支援遊戲狀態保存與恢復</a:t>
-            </a:r>
-          </a:p>
-          <a:p>
-            <a:pPr>
-              <a:spcBef>
-                <a:spcPts val="800"/>
-              </a:spcBef>
-              <a:spcAft>
-                <a:spcPts val="800"/>
-              </a:spcAft>
-              <a:defRPr sz="2000">
-                <a:solidFill>
-                  <a:srgbClr val="34495E"/>
-                </a:solidFill>
-              </a:defRPr>
-            </a:pPr>
-            <a:r>
-              <a:t>✓ 直觀的命令列介面</a:t>
-            </a:r>
-          </a:p>
-          <a:p>
-            <a:pPr>
-              <a:spcBef>
-                <a:spcPts val="800"/>
-              </a:spcBef>
-              <a:spcAft>
-                <a:spcPts val="800"/>
-              </a:spcAft>
-              <a:defRPr sz="2000">
-                <a:solidFill>
-                  <a:srgbClr val="34495E"/>
-                </a:solidFill>
-              </a:defRPr>
-            </a:pPr>
-            <a:r>
-              <a:t>✓ 完整的文件與註解說明</a:t>
-            </a:r>
-          </a:p>
-        </p:txBody>
-      </p:sp>
-    </p:spTree>
-  </p:cSld>
-  <p:clrMapOvr>
-    <a:masterClrMapping/>
-  </p:clrMapOvr>
-</p:sld>
-</file>
-
-<file path=ppt/slides/slide11.xml><?xml version="1.0" encoding="utf-8"?>
+<file path=ppt/slides/slide2.xml><?xml version="1.0" encoding="utf-8"?>
 <p:sld xmlns:a="http://schemas.openxmlformats.org/drawingml/2006/main" xmlns:p="http://schemas.openxmlformats.org/presentationml/2006/main" xmlns:r="http://schemas.openxmlformats.org/officeDocument/2006/relationships">
   <p:cSld>
     <p:bg>
@@ -3429,7 +3230,7 @@
               </a:defRPr>
             </a:pPr>
             <a:r>
-              <a:t>感謝觀看</a:t>
+              <a:t>系級班級</a:t>
             </a:r>
           </a:p>
         </p:txBody>
@@ -3464,181 +3265,7 @@
               </a:defRPr>
             </a:pPr>
             <a:r>
-              <a:t>踩地雷遊戲專案示範完畢</a:t>
-            </a:r>
-          </a:p>
-        </p:txBody>
-      </p:sp>
-    </p:spTree>
-  </p:cSld>
-  <p:clrMapOvr>
-    <a:masterClrMapping/>
-  </p:clrMapOvr>
-</p:sld>
-</file>
-
-<file path=ppt/slides/slide2.xml><?xml version="1.0" encoding="utf-8"?>
-<p:sld xmlns:a="http://schemas.openxmlformats.org/drawingml/2006/main" xmlns:p="http://schemas.openxmlformats.org/presentationml/2006/main" xmlns:r="http://schemas.openxmlformats.org/officeDocument/2006/relationships">
-  <p:cSld>
-    <p:bg>
-      <p:bgPr>
-        <a:solidFill>
-          <a:srgbClr val="ECF0F1"/>
-        </a:solidFill>
-        <a:effectLst/>
-      </p:bgPr>
-    </p:bg>
-    <p:spTree>
-      <p:nvGrpSpPr>
-        <p:cNvPr id="1" name=""/>
-        <p:cNvGrpSpPr/>
-        <p:nvPr/>
-      </p:nvGrpSpPr>
-      <p:grpSpPr/>
-      <p:sp>
-        <p:nvSpPr>
-          <p:cNvPr id="2" name="TextBox 1"/>
-          <p:cNvSpPr txBox="1"/>
-          <p:nvPr/>
-        </p:nvSpPr>
-        <p:spPr>
-          <a:xfrm>
-            <a:off x="457200" y="457200"/>
-            <a:ext cx="8229600" cy="731520"/>
-          </a:xfrm>
-          <a:prstGeom prst="rect">
-            <a:avLst/>
-          </a:prstGeom>
-          <a:noFill/>
-        </p:spPr>
-        <p:txBody>
-          <a:bodyPr wrap="none">
-            <a:spAutoFit/>
-          </a:bodyPr>
-          <a:lstStyle/>
-          <a:p>
-            <a:pPr>
-              <a:defRPr sz="4400" b="1">
-                <a:solidFill>
-                  <a:srgbClr val="2980B9"/>
-                </a:solidFill>
-              </a:defRPr>
-            </a:pPr>
-            <a:r>
-              <a:t>專案概述</a:t>
-            </a:r>
-          </a:p>
-        </p:txBody>
-      </p:sp>
-      <p:sp>
-        <p:nvSpPr>
-          <p:cNvPr id="3" name="TextBox 2"/>
-          <p:cNvSpPr txBox="1"/>
-          <p:nvPr/>
-        </p:nvSpPr>
-        <p:spPr>
-          <a:xfrm>
-            <a:off x="731520" y="1371600"/>
-            <a:ext cx="7680960" cy="5029200"/>
-          </a:xfrm>
-          <a:prstGeom prst="rect">
-            <a:avLst/>
-          </a:prstGeom>
-          <a:noFill/>
-        </p:spPr>
-        <p:txBody>
-          <a:bodyPr wrap="square">
-            <a:spAutoFit/>
-          </a:bodyPr>
-          <a:lstStyle/>
-          <a:p>
-            <a:pPr>
-              <a:spcBef>
-                <a:spcPts val="800"/>
-              </a:spcBef>
-              <a:spcAft>
-                <a:spcPts val="800"/>
-              </a:spcAft>
-              <a:defRPr sz="2000">
-                <a:solidFill>
-                  <a:srgbClr val="34495E"/>
-                </a:solidFill>
-              </a:defRPr>
-            </a:pPr>
-            <a:r>
-              <a:t>• 一個使用 C++ 開發的經典踩地雷遊戲</a:t>
-            </a:r>
-          </a:p>
-          <a:p>
-            <a:pPr>
-              <a:spcBef>
-                <a:spcPts val="800"/>
-              </a:spcBef>
-              <a:spcAft>
-                <a:spcPts val="800"/>
-              </a:spcAft>
-              <a:defRPr sz="2000">
-                <a:solidFill>
-                  <a:srgbClr val="34495E"/>
-                </a:solidFill>
-              </a:defRPr>
-            </a:pPr>
-            <a:r>
-              <a:t>• 提供三個難度等級供玩家選擇</a:t>
-            </a:r>
-          </a:p>
-          <a:p>
-            <a:pPr>
-              <a:spcBef>
-                <a:spcPts val="800"/>
-              </a:spcBef>
-              <a:spcAft>
-                <a:spcPts val="800"/>
-              </a:spcAft>
-              <a:defRPr sz="2000">
-                <a:solidFill>
-                  <a:srgbClr val="34495E"/>
-                </a:solidFill>
-              </a:defRPr>
-            </a:pPr>
-            <a:r>
-              <a:t>• 透過邏輯推理和運氣揭露所有非地雷格子</a:t>
-            </a:r>
-          </a:p>
-          <a:p>
-            <a:pPr>
-              <a:spcBef>
-                <a:spcPts val="800"/>
-              </a:spcBef>
-              <a:spcAft>
-                <a:spcPts val="800"/>
-              </a:spcAft>
-              <a:defRPr sz="2000">
-                <a:solidFill>
-                  <a:srgbClr val="34495E"/>
-                </a:solidFill>
-              </a:defRPr>
-            </a:pPr>
-            <a:r>
-              <a:t>• 結合命令列介面與圖形化顯示</a:t>
-            </a:r>
-          </a:p>
-          <a:p>
-            <a:pPr>
-              <a:spcBef>
-                <a:spcPts val="800"/>
-              </a:spcBef>
-              <a:spcAft>
-                <a:spcPts val="800"/>
-              </a:spcAft>
-              <a:defRPr sz="2000">
-                <a:solidFill>
-                  <a:srgbClr val="34495E"/>
-                </a:solidFill>
-              </a:defRPr>
-            </a:pPr>
-            <a:r>
-              <a:t>• 支援 Windows、Linux、macOS 跨平台執行</a:t>
+              <a:t>資訊工程系 3B</a:t>
             </a:r>
           </a:p>
         </p:txBody>
@@ -3699,7 +3326,7 @@
               </a:defRPr>
             </a:pPr>
             <a:r>
-              <a:t>專案團隊</a:t>
+              <a:t>成員資訊</a:t>
             </a:r>
           </a:p>
         </p:txBody>
@@ -3843,7 +3470,7 @@
     <p:bg>
       <p:bgPr>
         <a:solidFill>
-          <a:srgbClr val="ECF0F1"/>
+          <a:srgbClr val="2980B9"/>
         </a:solidFill>
         <a:effectLst/>
       </p:bgPr>
@@ -3863,8 +3490,8 @@
         </p:nvSpPr>
         <p:spPr>
           <a:xfrm>
-            <a:off x="457200" y="457200"/>
-            <a:ext cx="8229600" cy="731520"/>
+            <a:off x="457200" y="2286000"/>
+            <a:ext cx="8229600" cy="1371600"/>
           </a:xfrm>
           <a:prstGeom prst="rect">
             <a:avLst/>
@@ -3877,15 +3504,15 @@
           </a:bodyPr>
           <a:lstStyle/>
           <a:p>
-            <a:pPr>
-              <a:defRPr sz="4400" b="1">
-                <a:solidFill>
-                  <a:srgbClr val="2980B9"/>
-                </a:solidFill>
-              </a:defRPr>
-            </a:pPr>
-            <a:r>
-              <a:t>遊戲規則</a:t>
+            <a:pPr algn="ctr">
+              <a:defRPr sz="6000" b="1">
+                <a:solidFill>
+                  <a:srgbClr val="FFFFFF"/>
+                </a:solidFill>
+              </a:defRPr>
+            </a:pPr>
+            <a:r>
+              <a:t>小專題題目</a:t>
             </a:r>
           </a:p>
         </p:txBody>
@@ -3898,8 +3525,8 @@
         </p:nvSpPr>
         <p:spPr>
           <a:xfrm>
-            <a:off x="731520" y="1371600"/>
-            <a:ext cx="7680960" cy="5029200"/>
+            <a:off x="457200" y="3840480"/>
+            <a:ext cx="8229600" cy="914400"/>
           </a:xfrm>
           <a:prstGeom prst="rect">
             <a:avLst/>
@@ -3907,152 +3534,25 @@
           <a:noFill/>
         </p:spPr>
         <p:txBody>
-          <a:bodyPr wrap="square">
+          <a:bodyPr wrap="none">
             <a:spAutoFit/>
           </a:bodyPr>
           <a:lstStyle/>
           <a:p>
-            <a:pPr>
-              <a:spcBef>
-                <a:spcPts val="800"/>
-              </a:spcBef>
-              <a:spcAft>
-                <a:spcPts val="800"/>
-              </a:spcAft>
-              <a:defRPr sz="2000">
-                <a:solidFill>
-                  <a:srgbClr val="34495E"/>
-                </a:solidFill>
-              </a:defRPr>
-            </a:pPr>
-            <a:r>
-              <a:t>1. 選擇難度等級，遊戲隨機布置地雷</a:t>
-            </a:r>
-          </a:p>
-          <a:p>
-            <a:pPr>
-              <a:spcBef>
-                <a:spcPts val="800"/>
-              </a:spcBef>
-              <a:spcAft>
-                <a:spcPts val="800"/>
-              </a:spcAft>
-              <a:defRPr sz="2000">
-                <a:solidFill>
-                  <a:srgbClr val="34495E"/>
-                </a:solidFill>
-              </a:defRPr>
-            </a:pPr>
-            <a:r>
-              <a:t>2. 輸入坐標揭露格子</a:t>
-            </a:r>
-          </a:p>
-          <a:p>
-            <a:pPr>
-              <a:spcBef>
-                <a:spcPts val="800"/>
-              </a:spcBef>
-              <a:spcAft>
-                <a:spcPts val="800"/>
-              </a:spcAft>
-              <a:defRPr sz="2000">
-                <a:solidFill>
-                  <a:srgbClr val="34495E"/>
-                </a:solidFill>
-              </a:defRPr>
-            </a:pPr>
-            <a:r>
-              <a:t>3. 格子顯示：</a:t>
-            </a:r>
-          </a:p>
-          <a:p>
-            <a:pPr>
-              <a:spcBef>
-                <a:spcPts val="800"/>
-              </a:spcBef>
-              <a:spcAft>
-                <a:spcPts val="800"/>
-              </a:spcAft>
-              <a:defRPr sz="2000">
-                <a:solidFill>
-                  <a:srgbClr val="34495E"/>
-                </a:solidFill>
-              </a:defRPr>
-            </a:pPr>
-            <a:r>
-              <a:t>   💣 地雷（遊戲失敗）</a:t>
-            </a:r>
-          </a:p>
-          <a:p>
-            <a:pPr>
-              <a:spcBef>
-                <a:spcPts val="800"/>
-              </a:spcBef>
-              <a:spcAft>
-                <a:spcPts val="800"/>
-              </a:spcAft>
-              <a:defRPr sz="2000">
-                <a:solidFill>
-                  <a:srgbClr val="34495E"/>
-                </a:solidFill>
-              </a:defRPr>
-            </a:pPr>
-            <a:r>
-              <a:t>   · 空格（周圍沒有地雷）</a:t>
-            </a:r>
-          </a:p>
-          <a:p>
-            <a:pPr>
-              <a:spcBef>
-                <a:spcPts val="800"/>
-              </a:spcBef>
-              <a:spcAft>
-                <a:spcPts val="800"/>
-              </a:spcAft>
-              <a:defRPr sz="2000">
-                <a:solidFill>
-                  <a:srgbClr val="34495E"/>
-                </a:solidFill>
-              </a:defRPr>
-            </a:pPr>
-            <a:r>
-              <a:t>   1-8 相鄰地雷個數</a:t>
-            </a:r>
-          </a:p>
-          <a:p>
-            <a:pPr>
-              <a:spcBef>
-                <a:spcPts val="800"/>
-              </a:spcBef>
-              <a:spcAft>
-                <a:spcPts val="800"/>
-              </a:spcAft>
-              <a:defRPr sz="2000">
-                <a:solidFill>
-                  <a:srgbClr val="34495E"/>
-                </a:solidFill>
-              </a:defRPr>
-            </a:pPr>
-            <a:r>
-              <a:t>4. 標記懷疑的地雷位置（🚩）</a:t>
-            </a:r>
-          </a:p>
-          <a:p>
-            <a:pPr>
-              <a:spcBef>
-                <a:spcPts val="800"/>
-              </a:spcBef>
-              <a:spcAft>
-                <a:spcPts val="800"/>
-              </a:spcAft>
-              <a:defRPr sz="2000">
-                <a:solidFill>
-                  <a:srgbClr val="34495E"/>
-                </a:solidFill>
-              </a:defRPr>
-            </a:pPr>
-            <a:r>
-              <a:t>5. 揭露所有非地雷格子即獲勝</a:t>
+            <a:pPr algn="ctr">
+              <a:defRPr sz="2800">
+                <a:solidFill>
+                  <a:srgbClr val="FFFFFF"/>
+                </a:solidFill>
+              </a:defRPr>
+            </a:pPr>
+            <a:r>
+              <a:t>踩地雷遊戲</a:t>
+            </a:r>
+          </a:p>
+          <a:p>
+            <a:r>
+              <a:t>(Minesweeper Game)</a:t>
             </a:r>
           </a:p>
         </p:txBody>
@@ -4113,7 +3613,7 @@
               </a:defRPr>
             </a:pPr>
             <a:r>
-              <a:t>難度等級與設定</a:t>
+              <a:t>程式介紹 (UML 圖與操作說明)</a:t>
             </a:r>
           </a:p>
         </p:txBody>
@@ -4126,8 +3626,8 @@
         </p:nvSpPr>
         <p:spPr>
           <a:xfrm>
-            <a:off x="457200" y="1371600"/>
-            <a:ext cx="4114800" cy="365760"/>
+            <a:off x="731520" y="1371600"/>
+            <a:ext cx="7680960" cy="5029200"/>
           </a:xfrm>
           <a:prstGeom prst="rect">
             <a:avLst/>
@@ -4135,41 +3635,6 @@
           <a:noFill/>
         </p:spPr>
         <p:txBody>
-          <a:bodyPr wrap="none">
-            <a:spAutoFit/>
-          </a:bodyPr>
-          <a:lstStyle/>
-          <a:p>
-            <a:pPr>
-              <a:defRPr sz="2200" b="1">
-                <a:solidFill>
-                  <a:srgbClr val="34495E"/>
-                </a:solidFill>
-              </a:defRPr>
-            </a:pPr>
-            <a:r>
-              <a:t>難度等級</a:t>
-            </a:r>
-          </a:p>
-        </p:txBody>
-      </p:sp>
-      <p:sp>
-        <p:nvSpPr>
-          <p:cNvPr id="4" name="TextBox 3"/>
-          <p:cNvSpPr txBox="1"/>
-          <p:nvPr/>
-        </p:nvSpPr>
-        <p:spPr>
-          <a:xfrm>
-            <a:off x="457200" y="1828800"/>
-            <a:ext cx="4114800" cy="4572000"/>
-          </a:xfrm>
-          <a:prstGeom prst="rect">
-            <a:avLst/>
-          </a:prstGeom>
-          <a:noFill/>
-        </p:spPr>
-        <p:txBody>
           <a:bodyPr wrap="square">
             <a:spAutoFit/>
           </a:bodyPr>
@@ -4177,167 +3642,124 @@
           <a:p>
             <a:pPr>
               <a:spcBef>
-                <a:spcPts val="400"/>
+                <a:spcPts val="800"/>
               </a:spcBef>
               <a:spcAft>
-                <a:spcPts val="400"/>
+                <a:spcPts val="800"/>
               </a:spcAft>
-              <a:defRPr sz="1800">
+              <a:defRPr sz="2000">
                 <a:solidFill>
                   <a:srgbClr val="34495E"/>
                 </a:solidFill>
               </a:defRPr>
             </a:pPr>
             <a:r>
-              <a:t>簡單</a:t>
+              <a:t>系統架構設計：</a:t>
             </a:r>
           </a:p>
           <a:p>
             <a:pPr>
               <a:spcBef>
-                <a:spcPts val="400"/>
+                <a:spcPts val="800"/>
               </a:spcBef>
               <a:spcAft>
-                <a:spcPts val="400"/>
+                <a:spcPts val="800"/>
               </a:spcAft>
-              <a:defRPr sz="1800">
+              <a:defRPr sz="2000">
                 <a:solidFill>
                   <a:srgbClr val="34495E"/>
                 </a:solidFill>
               </a:defRPr>
             </a:pPr>
             <a:r>
-              <a:t>中等</a:t>
+              <a:t>  • Cell 類別 - 代表棋盤上的單一格子</a:t>
             </a:r>
           </a:p>
           <a:p>
             <a:pPr>
               <a:spcBef>
-                <a:spcPts val="400"/>
+                <a:spcPts val="800"/>
               </a:spcBef>
               <a:spcAft>
-                <a:spcPts val="400"/>
+                <a:spcPts val="800"/>
               </a:spcAft>
-              <a:defRPr sz="1800">
+              <a:defRPr sz="2000">
                 <a:solidFill>
                   <a:srgbClr val="34495E"/>
                 </a:solidFill>
               </a:defRPr>
             </a:pPr>
             <a:r>
-              <a:t>困難</a:t>
-            </a:r>
-          </a:p>
-        </p:txBody>
-      </p:sp>
-      <p:sp>
-        <p:nvSpPr>
-          <p:cNvPr id="5" name="TextBox 4"/>
-          <p:cNvSpPr txBox="1"/>
-          <p:nvPr/>
-        </p:nvSpPr>
-        <p:spPr>
-          <a:xfrm>
-            <a:off x="4754880" y="1371600"/>
-            <a:ext cx="3931920" cy="365760"/>
-          </a:xfrm>
-          <a:prstGeom prst="rect">
-            <a:avLst/>
-          </a:prstGeom>
-          <a:noFill/>
-        </p:spPr>
-        <p:txBody>
-          <a:bodyPr wrap="none">
-            <a:spAutoFit/>
-          </a:bodyPr>
-          <a:lstStyle/>
-          <a:p>
-            <a:pPr>
-              <a:defRPr sz="2200" b="1">
-                <a:solidFill>
-                  <a:srgbClr val="34495E"/>
-                </a:solidFill>
-              </a:defRPr>
-            </a:pPr>
-            <a:r>
-              <a:t>對應設定</a:t>
-            </a:r>
-          </a:p>
-        </p:txBody>
-      </p:sp>
-      <p:sp>
-        <p:nvSpPr>
-          <p:cNvPr id="6" name="TextBox 5"/>
-          <p:cNvSpPr txBox="1"/>
-          <p:nvPr/>
-        </p:nvSpPr>
-        <p:spPr>
-          <a:xfrm>
-            <a:off x="4754880" y="1828800"/>
-            <a:ext cx="3931920" cy="4572000"/>
-          </a:xfrm>
-          <a:prstGeom prst="rect">
-            <a:avLst/>
-          </a:prstGeom>
-          <a:noFill/>
-        </p:spPr>
-        <p:txBody>
-          <a:bodyPr wrap="square">
-            <a:spAutoFit/>
-          </a:bodyPr>
-          <a:lstStyle/>
+              <a:t>  • Board 類別 - 管理棋盤狀態和地雷位置</a:t>
+            </a:r>
+          </a:p>
           <a:p>
             <a:pPr>
               <a:spcBef>
-                <a:spcPts val="400"/>
+                <a:spcPts val="800"/>
               </a:spcBef>
               <a:spcAft>
-                <a:spcPts val="400"/>
+                <a:spcPts val="800"/>
               </a:spcAft>
-              <a:defRPr sz="1800">
+              <a:defRPr sz="2000">
                 <a:solidFill>
                   <a:srgbClr val="34495E"/>
                 </a:solidFill>
               </a:defRPr>
             </a:pPr>
             <a:r>
-              <a:t>8×8 棋盤，10 個地雷</a:t>
+              <a:t>  • Game 類別 - 控制遊戲主邏輯</a:t>
             </a:r>
           </a:p>
           <a:p>
             <a:pPr>
               <a:spcBef>
-                <a:spcPts val="400"/>
+                <a:spcPts val="800"/>
               </a:spcBef>
               <a:spcAft>
-                <a:spcPts val="400"/>
+                <a:spcPts val="800"/>
               </a:spcAft>
-              <a:defRPr sz="1800">
+              <a:defRPr sz="2000">
                 <a:solidFill>
                   <a:srgbClr val="34495E"/>
                 </a:solidFill>
               </a:defRPr>
             </a:pPr>
             <a:r>
-              <a:t>12×12 棋盤，30 個地雷</a:t>
+              <a:t>  • Display 類別 - 負責棋盤顯示</a:t>
             </a:r>
           </a:p>
           <a:p>
             <a:pPr>
               <a:spcBef>
-                <a:spcPts val="400"/>
+                <a:spcPts val="800"/>
               </a:spcBef>
               <a:spcAft>
-                <a:spcPts val="400"/>
+                <a:spcPts val="800"/>
               </a:spcAft>
-              <a:defRPr sz="1800">
+              <a:defRPr sz="2000">
                 <a:solidFill>
                   <a:srgbClr val="34495E"/>
                 </a:solidFill>
               </a:defRPr>
             </a:pPr>
-            <a:r>
-              <a:t>16×16 棋盤，40 個地雷</a:t>
+          </a:p>
+          <a:p>
+            <a:pPr>
+              <a:spcBef>
+                <a:spcPts val="800"/>
+              </a:spcBef>
+              <a:spcAft>
+                <a:spcPts val="800"/>
+              </a:spcAft>
+              <a:defRPr sz="2000">
+                <a:solidFill>
+                  <a:srgbClr val="34495E"/>
+                </a:solidFill>
+              </a:defRPr>
+            </a:pPr>
+            <a:r>
+              <a:t>遊戲規則：選擇難度 → 揭露格子 → 避開地雷 → 標記疑似地雷 → 贏得遊戲</a:t>
             </a:r>
           </a:p>
         </p:txBody>
@@ -4398,7 +3820,7 @@
               </a:defRPr>
             </a:pPr>
             <a:r>
-              <a:t>系統架構 - 核心類別</a:t>
+              <a:t>程式如何安裝執行</a:t>
             </a:r>
           </a:p>
         </p:txBody>
@@ -4439,7 +3861,7 @@
               </a:defRPr>
             </a:pPr>
             <a:r>
-              <a:t>Cell 類別：</a:t>
+              <a:t>快速開始（Windows 用戶）：</a:t>
             </a:r>
           </a:p>
           <a:p>
@@ -4457,7 +3879,7 @@
               </a:defRPr>
             </a:pPr>
             <a:r>
-              <a:t>  • 代表棋盤上的單一格子</a:t>
+              <a:t>1. 進入 Releases 頁面</a:t>
             </a:r>
           </a:p>
           <a:p>
@@ -4475,7 +3897,7 @@
               </a:defRPr>
             </a:pPr>
             <a:r>
-              <a:t>  • 屬性：是否為地雷、是否揭露、是否標記、相鄰地雷數</a:t>
+              <a:t>2. 下載最新的 minesweeper.exe</a:t>
             </a:r>
           </a:p>
           <a:p>
@@ -4492,6 +3914,9 @@
                 </a:solidFill>
               </a:defRPr>
             </a:pPr>
+            <a:r>
+              <a:t>3. 雙擊執行</a:t>
+            </a:r>
           </a:p>
           <a:p>
             <a:pPr>
@@ -4507,9 +3932,6 @@
                 </a:solidFill>
               </a:defRPr>
             </a:pPr>
-            <a:r>
-              <a:t>Board 類別：</a:t>
-            </a:r>
           </a:p>
           <a:p>
             <a:pPr>
@@ -4526,7 +3948,7 @@
               </a:defRPr>
             </a:pPr>
             <a:r>
-              <a:t>  • 管理整個棋盤的狀態</a:t>
+              <a:t>Linux / macOS 用戶：</a:t>
             </a:r>
           </a:p>
           <a:p>
@@ -4544,7 +3966,25 @@
               </a:defRPr>
             </a:pPr>
             <a:r>
-              <a:t>  • 地雷位置隨機生成、計算相鄰地雷數</a:t>
+              <a:t>1. 下載並解壓 ZIP 檔案</a:t>
+            </a:r>
+          </a:p>
+          <a:p>
+            <a:pPr>
+              <a:spcBef>
+                <a:spcPts val="800"/>
+              </a:spcBef>
+              <a:spcAft>
+                <a:spcPts val="800"/>
+              </a:spcAft>
+              <a:defRPr sz="2000">
+                <a:solidFill>
+                  <a:srgbClr val="34495E"/>
+                </a:solidFill>
+              </a:defRPr>
+            </a:pPr>
+            <a:r>
+              <a:t>2. 進入資料夾執行 ./minesweeper</a:t>
             </a:r>
           </a:p>
         </p:txBody>
@@ -4605,7 +4045,7 @@
               </a:defRPr>
             </a:pPr>
             <a:r>
-              <a:t>系統架構 - 遊戲流程</a:t>
+              <a:t>程式畫面示範</a:t>
             </a:r>
           </a:p>
         </p:txBody>
@@ -4646,7 +4086,7 @@
               </a:defRPr>
             </a:pPr>
             <a:r>
-              <a:t>Game 類別：</a:t>
+              <a:t>遊戲開始畫面：</a:t>
             </a:r>
           </a:p>
           <a:p>
@@ -4664,7 +4104,7 @@
               </a:defRPr>
             </a:pPr>
             <a:r>
-              <a:t>  • 控制遊戲主邏輯</a:t>
+              <a:t>  ┌─────────────────────┐</a:t>
             </a:r>
           </a:p>
           <a:p>
@@ -4682,7 +4122,7 @@
               </a:defRPr>
             </a:pPr>
             <a:r>
-              <a:t>  • 管理遊戲狀態（進行中、勝利、失敗）</a:t>
+              <a:t>  │  踩地雷遊戲        │</a:t>
             </a:r>
           </a:p>
           <a:p>
@@ -4700,7 +4140,7 @@
               </a:defRPr>
             </a:pPr>
             <a:r>
-              <a:t>  • 處理玩家輸入和遊戲進行</a:t>
+              <a:t>  │  1. 簡單  2. 中等  3. 困難</a:t>
             </a:r>
           </a:p>
           <a:p>
@@ -4717,6 +4157,9 @@
                 </a:solidFill>
               </a:defRPr>
             </a:pPr>
+            <a:r>
+              <a:t>  │  請選擇難度：     │</a:t>
+            </a:r>
           </a:p>
           <a:p>
             <a:pPr>
@@ -4733,7 +4176,7 @@
               </a:defRPr>
             </a:pPr>
             <a:r>
-              <a:t>Display 類別：</a:t>
+              <a:t>  └─────────────────────┘</a:t>
             </a:r>
           </a:p>
           <a:p>
@@ -4750,8 +4193,41 @@
                 </a:solidFill>
               </a:defRPr>
             </a:pPr>
-            <a:r>
-              <a:t>  • 負責將棋盤狀態顯示給玩家</a:t>
+          </a:p>
+          <a:p>
+            <a:pPr>
+              <a:spcBef>
+                <a:spcPts val="800"/>
+              </a:spcBef>
+              <a:spcAft>
+                <a:spcPts val="800"/>
+              </a:spcAft>
+              <a:defRPr sz="2000">
+                <a:solidFill>
+                  <a:srgbClr val="34495E"/>
+                </a:solidFill>
+              </a:defRPr>
+            </a:pPr>
+            <a:r>
+              <a:t>遊戲中顯示：棋盤格子、地雷數量、遊戲狀態</a:t>
+            </a:r>
+          </a:p>
+          <a:p>
+            <a:pPr>
+              <a:spcBef>
+                <a:spcPts val="800"/>
+              </a:spcBef>
+              <a:spcAft>
+                <a:spcPts val="800"/>
+              </a:spcAft>
+              <a:defRPr sz="2000">
+                <a:solidFill>
+                  <a:srgbClr val="34495E"/>
+                </a:solidFill>
+              </a:defRPr>
+            </a:pPr>
+            <a:r>
+              <a:t>遊戲結束：勝利或失敗訊息顯示</a:t>
             </a:r>
           </a:p>
         </p:txBody>
@@ -4812,7 +4288,7 @@
               </a:defRPr>
             </a:pPr>
             <a:r>
-              <a:t>專案文件結構</a:t>
+              <a:t>分工資訊</a:t>
             </a:r>
           </a:p>
         </p:txBody>
@@ -4825,8 +4301,8 @@
         </p:nvSpPr>
         <p:spPr>
           <a:xfrm>
-            <a:off x="457200" y="1371600"/>
-            <a:ext cx="4114800" cy="365760"/>
+            <a:off x="731520" y="1371600"/>
+            <a:ext cx="7680960" cy="5029200"/>
           </a:xfrm>
           <a:prstGeom prst="rect">
             <a:avLst/>
@@ -4834,41 +4310,6 @@
           <a:noFill/>
         </p:spPr>
         <p:txBody>
-          <a:bodyPr wrap="none">
-            <a:spAutoFit/>
-          </a:bodyPr>
-          <a:lstStyle/>
-          <a:p>
-            <a:pPr>
-              <a:defRPr sz="2200" b="1">
-                <a:solidFill>
-                  <a:srgbClr val="34495E"/>
-                </a:solidFill>
-              </a:defRPr>
-            </a:pPr>
-            <a:r>
-              <a:t>標頭檔案</a:t>
-            </a:r>
-          </a:p>
-        </p:txBody>
-      </p:sp>
-      <p:sp>
-        <p:nvSpPr>
-          <p:cNvPr id="4" name="TextBox 3"/>
-          <p:cNvSpPr txBox="1"/>
-          <p:nvPr/>
-        </p:nvSpPr>
-        <p:spPr>
-          <a:xfrm>
-            <a:off x="457200" y="1828800"/>
-            <a:ext cx="4114800" cy="4572000"/>
-          </a:xfrm>
-          <a:prstGeom prst="rect">
-            <a:avLst/>
-          </a:prstGeom>
-          <a:noFill/>
-        </p:spPr>
-        <p:txBody>
           <a:bodyPr wrap="square">
             <a:spAutoFit/>
           </a:bodyPr>
@@ -4876,221 +4317,142 @@
           <a:p>
             <a:pPr>
               <a:spcBef>
-                <a:spcPts val="400"/>
+                <a:spcPts val="800"/>
               </a:spcBef>
               <a:spcAft>
-                <a:spcPts val="400"/>
+                <a:spcPts val="800"/>
               </a:spcAft>
-              <a:defRPr sz="1800">
+              <a:defRPr sz="2000">
                 <a:solidFill>
                   <a:srgbClr val="34495E"/>
                 </a:solidFill>
               </a:defRPr>
             </a:pPr>
             <a:r>
-              <a:t>board.h - 棋盤類別</a:t>
+              <a:t>詹書豪 (B2230041) - 組長</a:t>
             </a:r>
           </a:p>
           <a:p>
             <a:pPr>
               <a:spcBef>
-                <a:spcPts val="400"/>
+                <a:spcPts val="800"/>
               </a:spcBef>
               <a:spcAft>
-                <a:spcPts val="400"/>
+                <a:spcPts val="800"/>
               </a:spcAft>
-              <a:defRPr sz="1800">
+              <a:defRPr sz="2000">
                 <a:solidFill>
                   <a:srgbClr val="34495E"/>
                 </a:solidFill>
               </a:defRPr>
             </a:pPr>
             <a:r>
-              <a:t>cell.h - 格子類別</a:t>
+              <a:t>  • 整體專案規劃與架構設計</a:t>
             </a:r>
           </a:p>
           <a:p>
             <a:pPr>
               <a:spcBef>
-                <a:spcPts val="400"/>
+                <a:spcPts val="800"/>
               </a:spcBef>
               <a:spcAft>
-                <a:spcPts val="400"/>
+                <a:spcPts val="800"/>
               </a:spcAft>
-              <a:defRPr sz="1800">
+              <a:defRPr sz="2000">
                 <a:solidFill>
                   <a:srgbClr val="34495E"/>
                 </a:solidFill>
               </a:defRPr>
             </a:pPr>
             <a:r>
-              <a:t>display.h - 顯示類別</a:t>
+              <a:t>  • Cell 類別開發</a:t>
             </a:r>
           </a:p>
           <a:p>
             <a:pPr>
               <a:spcBef>
-                <a:spcPts val="400"/>
+                <a:spcPts val="800"/>
               </a:spcBef>
               <a:spcAft>
-                <a:spcPts val="400"/>
+                <a:spcPts val="800"/>
               </a:spcAft>
-              <a:defRPr sz="1800">
+              <a:defRPr sz="2000">
                 <a:solidFill>
                   <a:srgbClr val="34495E"/>
                 </a:solidFill>
               </a:defRPr>
             </a:pPr>
             <a:r>
-              <a:t>game.h - 遊戲類別</a:t>
-            </a:r>
-          </a:p>
-        </p:txBody>
-      </p:sp>
-      <p:sp>
-        <p:nvSpPr>
-          <p:cNvPr id="5" name="TextBox 4"/>
-          <p:cNvSpPr txBox="1"/>
-          <p:nvPr/>
-        </p:nvSpPr>
-        <p:spPr>
-          <a:xfrm>
-            <a:off x="4754880" y="1371600"/>
-            <a:ext cx="3931920" cy="365760"/>
-          </a:xfrm>
-          <a:prstGeom prst="rect">
-            <a:avLst/>
-          </a:prstGeom>
-          <a:noFill/>
-        </p:spPr>
-        <p:txBody>
-          <a:bodyPr wrap="none">
-            <a:spAutoFit/>
-          </a:bodyPr>
-          <a:lstStyle/>
-          <a:p>
-            <a:pPr>
-              <a:defRPr sz="2200" b="1">
-                <a:solidFill>
-                  <a:srgbClr val="34495E"/>
-                </a:solidFill>
-              </a:defRPr>
-            </a:pPr>
-            <a:r>
-              <a:t>源程式檔案</a:t>
-            </a:r>
-          </a:p>
-        </p:txBody>
-      </p:sp>
-      <p:sp>
-        <p:nvSpPr>
-          <p:cNvPr id="6" name="TextBox 5"/>
-          <p:cNvSpPr txBox="1"/>
-          <p:nvPr/>
-        </p:nvSpPr>
-        <p:spPr>
-          <a:xfrm>
-            <a:off x="4754880" y="1828800"/>
-            <a:ext cx="3931920" cy="4572000"/>
-          </a:xfrm>
-          <a:prstGeom prst="rect">
-            <a:avLst/>
-          </a:prstGeom>
-          <a:noFill/>
-        </p:spPr>
-        <p:txBody>
-          <a:bodyPr wrap="square">
-            <a:spAutoFit/>
-          </a:bodyPr>
-          <a:lstStyle/>
+              <a:t>  • Board 類別開發</a:t>
+            </a:r>
+          </a:p>
           <a:p>
             <a:pPr>
               <a:spcBef>
-                <a:spcPts val="400"/>
+                <a:spcPts val="800"/>
               </a:spcBef>
               <a:spcAft>
-                <a:spcPts val="400"/>
+                <a:spcPts val="800"/>
               </a:spcAft>
-              <a:defRPr sz="1800">
+              <a:defRPr sz="2000">
                 <a:solidFill>
                   <a:srgbClr val="34495E"/>
                 </a:solidFill>
               </a:defRPr>
             </a:pPr>
             <a:r>
-              <a:t>main.cpp - 主程式入口</a:t>
+              <a:t>  • 程式整合與測試</a:t>
             </a:r>
           </a:p>
           <a:p>
             <a:pPr>
               <a:spcBef>
-                <a:spcPts val="400"/>
+                <a:spcPts val="800"/>
               </a:spcBef>
               <a:spcAft>
-                <a:spcPts val="400"/>
+                <a:spcPts val="800"/>
               </a:spcAft>
-              <a:defRPr sz="1800">
+              <a:defRPr sz="2000">
                 <a:solidFill>
                   <a:srgbClr val="34495E"/>
                 </a:solidFill>
               </a:defRPr>
             </a:pPr>
-            <a:r>
-              <a:t>board.cpp - 棋盤實現</a:t>
-            </a:r>
           </a:p>
           <a:p>
             <a:pPr>
               <a:spcBef>
-                <a:spcPts val="400"/>
+                <a:spcPts val="800"/>
               </a:spcBef>
               <a:spcAft>
-                <a:spcPts val="400"/>
+                <a:spcPts val="800"/>
               </a:spcAft>
-              <a:defRPr sz="1800">
+              <a:defRPr sz="2000">
                 <a:solidFill>
                   <a:srgbClr val="34495E"/>
                 </a:solidFill>
               </a:defRPr>
             </a:pPr>
             <a:r>
-              <a:t>cell.cpp - 格子實現</a:t>
+              <a:t>李程絛 (B2230319) &amp; 林元皓 (B3401214)</a:t>
             </a:r>
           </a:p>
           <a:p>
             <a:pPr>
               <a:spcBef>
-                <a:spcPts val="400"/>
+                <a:spcPts val="800"/>
               </a:spcBef>
               <a:spcAft>
-                <a:spcPts val="400"/>
+                <a:spcPts val="800"/>
               </a:spcAft>
-              <a:defRPr sz="1800">
+              <a:defRPr sz="2000">
                 <a:solidFill>
                   <a:srgbClr val="34495E"/>
                 </a:solidFill>
               </a:defRPr>
             </a:pPr>
             <a:r>
-              <a:t>display.cpp - 顯示實現</a:t>
-            </a:r>
-          </a:p>
-          <a:p>
-            <a:pPr>
-              <a:spcBef>
-                <a:spcPts val="400"/>
-              </a:spcBef>
-              <a:spcAft>
-                <a:spcPts val="400"/>
-              </a:spcAft>
-              <a:defRPr sz="1800">
-                <a:solidFill>
-                  <a:srgbClr val="34495E"/>
-                </a:solidFill>
-              </a:defRPr>
-            </a:pPr>
-            <a:r>
-              <a:t>game.cpp - 遊戲實現</a:t>
+              <a:t>  • 輔助開發和測試</a:t>
             </a:r>
           </a:p>
         </p:txBody>
@@ -5109,7 +4471,7 @@
     <p:bg>
       <p:bgPr>
         <a:solidFill>
-          <a:srgbClr val="ECF0F1"/>
+          <a:srgbClr val="2980B9"/>
         </a:solidFill>
         <a:effectLst/>
       </p:bgPr>
@@ -5129,8 +4491,8 @@
         </p:nvSpPr>
         <p:spPr>
           <a:xfrm>
-            <a:off x="457200" y="457200"/>
-            <a:ext cx="8229600" cy="731520"/>
+            <a:off x="457200" y="2286000"/>
+            <a:ext cx="8229600" cy="1371600"/>
           </a:xfrm>
           <a:prstGeom prst="rect">
             <a:avLst/>
@@ -5143,15 +4505,15 @@
           </a:bodyPr>
           <a:lstStyle/>
           <a:p>
-            <a:pPr>
-              <a:defRPr sz="4400" b="1">
-                <a:solidFill>
-                  <a:srgbClr val="2980B9"/>
-                </a:solidFill>
-              </a:defRPr>
-            </a:pPr>
-            <a:r>
-              <a:t>編譯與執行</a:t>
+            <a:pPr algn="ctr">
+              <a:defRPr sz="6000" b="1">
+                <a:solidFill>
+                  <a:srgbClr val="FFFFFF"/>
+                </a:solidFill>
+              </a:defRPr>
+            </a:pPr>
+            <a:r>
+              <a:t>GitHub 連結</a:t>
             </a:r>
           </a:p>
         </p:txBody>
@@ -5164,8 +4526,8 @@
         </p:nvSpPr>
         <p:spPr>
           <a:xfrm>
-            <a:off x="731520" y="1371600"/>
-            <a:ext cx="7680960" cy="5029200"/>
+            <a:off x="457200" y="3840480"/>
+            <a:ext cx="8229600" cy="914400"/>
           </a:xfrm>
           <a:prstGeom prst="rect">
             <a:avLst/>
@@ -5173,128 +4535,31 @@
           <a:noFill/>
         </p:spPr>
         <p:txBody>
-          <a:bodyPr wrap="square">
+          <a:bodyPr wrap="none">
             <a:spAutoFit/>
           </a:bodyPr>
           <a:lstStyle/>
           <a:p>
-            <a:pPr>
-              <a:spcBef>
-                <a:spcPts val="800"/>
-              </a:spcBef>
-              <a:spcAft>
-                <a:spcPts val="800"/>
-              </a:spcAft>
-              <a:defRPr sz="2000">
-                <a:solidFill>
-                  <a:srgbClr val="34495E"/>
-                </a:solidFill>
-              </a:defRPr>
-            </a:pPr>
-            <a:r>
-              <a:t>使用 Makefile 簡化編譯過程：</a:t>
-            </a:r>
-          </a:p>
-          <a:p>
-            <a:pPr>
-              <a:spcBef>
-                <a:spcPts val="800"/>
-              </a:spcBef>
-              <a:spcAft>
-                <a:spcPts val="800"/>
-              </a:spcAft>
-              <a:defRPr sz="2000">
-                <a:solidFill>
-                  <a:srgbClr val="34495E"/>
-                </a:solidFill>
-              </a:defRPr>
-            </a:pPr>
-          </a:p>
-          <a:p>
-            <a:pPr>
-              <a:spcBef>
-                <a:spcPts val="800"/>
-              </a:spcBef>
-              <a:spcAft>
-                <a:spcPts val="800"/>
-              </a:spcAft>
-              <a:defRPr sz="2000">
-                <a:solidFill>
-                  <a:srgbClr val="34495E"/>
-                </a:solidFill>
-              </a:defRPr>
-            </a:pPr>
-            <a:r>
-              <a:t>編譯：make</a:t>
-            </a:r>
-          </a:p>
-          <a:p>
-            <a:pPr>
-              <a:spcBef>
-                <a:spcPts val="800"/>
-              </a:spcBef>
-              <a:spcAft>
-                <a:spcPts val="800"/>
-              </a:spcAft>
-              <a:defRPr sz="2000">
-                <a:solidFill>
-                  <a:srgbClr val="34495E"/>
-                </a:solidFill>
-              </a:defRPr>
-            </a:pPr>
-            <a:r>
-              <a:t>執行：./minesweeper（Linux/macOS）或 minesweeper.exe（Windows）</a:t>
-            </a:r>
-          </a:p>
-          <a:p>
-            <a:pPr>
-              <a:spcBef>
-                <a:spcPts val="800"/>
-              </a:spcBef>
-              <a:spcAft>
-                <a:spcPts val="800"/>
-              </a:spcAft>
-              <a:defRPr sz="2000">
-                <a:solidFill>
-                  <a:srgbClr val="34495E"/>
-                </a:solidFill>
-              </a:defRPr>
-            </a:pPr>
-            <a:r>
-              <a:t>清理：make clean</a:t>
-            </a:r>
-          </a:p>
-          <a:p>
-            <a:pPr>
-              <a:spcBef>
-                <a:spcPts val="800"/>
-              </a:spcBef>
-              <a:spcAft>
-                <a:spcPts val="800"/>
-              </a:spcAft>
-              <a:defRPr sz="2000">
-                <a:solidFill>
-                  <a:srgbClr val="34495E"/>
-                </a:solidFill>
-              </a:defRPr>
-            </a:pPr>
-          </a:p>
-          <a:p>
-            <a:pPr>
-              <a:spcBef>
-                <a:spcPts val="800"/>
-              </a:spcBef>
-              <a:spcAft>
-                <a:spcPts val="800"/>
-              </a:spcAft>
-              <a:defRPr sz="2000">
-                <a:solidFill>
-                  <a:srgbClr val="34495E"/>
-                </a:solidFill>
-              </a:defRPr>
-            </a:pPr>
-            <a:r>
-              <a:t>系統要求：g++ 編譯器、C++17 標準</a:t>
+            <a:pPr algn="ctr">
+              <a:defRPr sz="2800">
+                <a:solidFill>
+                  <a:srgbClr val="FFFFFF"/>
+                </a:solidFill>
+              </a:defRPr>
+            </a:pPr>
+            <a:r>
+              <a:t>Repository:</a:t>
+            </a:r>
+          </a:p>
+          <a:p>
+            <a:r>
+              <a:t>https://github.com/XJacksonChrisX/minesweeper</a:t>
+            </a:r>
+          </a:p>
+          <a:p/>
+          <a:p>
+            <a:r>
+              <a:t>Download: Releases 頁面</a:t>
             </a:r>
           </a:p>
         </p:txBody>
